--- a/diploma/ВКР_презентация.pptx
+++ b/diploma/ВКР_презентация.pptx
@@ -3425,7 +3425,7 @@
                 </a:solidFill>
                 <a:latin typeface="Arial"/>
               </a:rPr>
-              <a:t>•  Тестирование подтвердило работоспособность и устойчивость к ложным срабатываниям</a:t>
+              <a:t>•  Защищённость: динамический идентификатор (rolling-code) и журналирование; доп. канал — по звонку</a:t>
             </a:r>
           </a:p>
           <a:p>
@@ -3441,7 +3441,23 @@
                 </a:solidFill>
                 <a:latin typeface="Arial"/>
               </a:rPr>
-              <a:t>•  Развитие: несколько приёмников, машинное обучение, защита от relay-атак</a:t>
+              <a:t>•  Тестирование подтвердило работоспособность и устойчивость к ложным срабатываниям</a:t>
+            </a:r>
+          </a:p>
+          <a:p>
+            <a:pPr>
+              <a:spcAft>
+                <a:spcPts val="800"/>
+              </a:spcAft>
+            </a:pPr>
+            <a:r>
+              <a:rPr sz="2000">
+                <a:solidFill>
+                  <a:srgbClr val="222A33"/>
+                </a:solidFill>
+                <a:latin typeface="Arial"/>
+              </a:rPr>
+              <a:t>•  Развитие: несколько приёмников, машинное обучение, протокол «запрос–ответ» против relay</a:t>
             </a:r>
           </a:p>
         </p:txBody>
@@ -4764,7 +4780,23 @@
                 </a:solidFill>
                 <a:latin typeface="Arial"/>
               </a:rPr>
-              <a:t>•  Идентификатор носителя — стабильный токен (не MAC, недоступный на Android)</a:t>
+              <a:t>•  Идентификатор носителя — стабильный токен (не MAC) или динамический rolling-code (HMAC-SHA256)</a:t>
+            </a:r>
+          </a:p>
+          <a:p>
+            <a:pPr>
+              <a:spcAft>
+                <a:spcPts val="800"/>
+              </a:spcAft>
+            </a:pPr>
+            <a:r>
+              <a:rPr sz="2000">
+                <a:solidFill>
+                  <a:srgbClr val="222A33"/>
+                </a:solidFill>
+                <a:latin typeface="Arial"/>
+              </a:rPr>
+              <a:t>•  Доп. канал доступа — по входящему звонку (номер в BCD)</a:t>
             </a:r>
           </a:p>
           <a:p>
